--- a/data/outputs/v2/Biology/SS1.2_Chemicals_of_Life/quiz/Biology_G10_SS1.2_Chemicals_of_Life_L2_QuickCheck.pptx
+++ b/data/outputs/v2/Biology/SS1.2_Chemicals_of_Life/quiz/Biology_G10_SS1.2_Chemicals_of_Life_L2_QuickCheck.pptx
@@ -1698,7 +1698,7 @@
                 <a:ea typeface="Arial" pitchFamily="34" charset="-122"/>
                 <a:cs typeface="Arial" pitchFamily="34" charset="-120"/>
               </a:rPr>
-              <a:t>Lesson 2: What Is Food Really Made Of? Introducing the Six Chemicals of Life</a:t>
+              <a:t>Lesson 2: Elements and Compounds of Life: What Is Wanjiru's Lunch Made Of?</a:t>
             </a:r>
             <a:endParaRPr lang="en-US" sz="2000" dirty="0"/>
           </a:p>
@@ -1982,7 +1982,7 @@
                 <a:ea typeface="Arial" pitchFamily="34" charset="-122"/>
                 <a:cs typeface="Arial" pitchFamily="34" charset="-120"/>
               </a:rPr>
-              <a:t>Use after: Predict phase</a:t>
+              <a:t>Use after: Observe phase</a:t>
             </a:r>
             <a:endParaRPr lang="en-US" sz="1100" dirty="0"/>
           </a:p>
@@ -2013,7 +2013,7 @@
               <a:buNone/>
             </a:pPr>
             <a:r>
-              <a:rPr lang="en-US" sz="1600" b="1" dirty="0">
+              <a:rPr lang="en-US" sz="1800" b="1" dirty="0">
                 <a:solidFill>
                   <a:srgbClr val="FFFFFF"/>
                 </a:solidFill>
@@ -2021,9 +2021,9 @@
                 <a:ea typeface="Arial" pitchFamily="34" charset="-122"/>
                 <a:cs typeface="Arial" pitchFamily="34" charset="-120"/>
               </a:rPr>
-              <a:t>Two children in the same village in Kisumu eat about the same amount of food every day. Child A eats only ugali and develops a swollen belly and thin limbs (kwashiorkor). Child B eats githeri (maize and beans) and stays healthy. Which idea best explains the difference?</a:t>
-            </a:r>
-            <a:endParaRPr lang="en-US" sz="1600" dirty="0"/>
+              <a:t>Wanjiru's meal has ugali (about 70 g carbohydrate), beans (about 20 g protein and 15 g carbohydrate), sukuma wiki (about 3 g protein plus fibre) and cooking oil (about 10 g fat). What is the total mass of carbohydrate in the meal?</a:t>
+            </a:r>
+            <a:endParaRPr lang="en-US" sz="1800" dirty="0"/>
           </a:p>
         </p:txBody>
       </p:sp>
@@ -2121,7 +2121,7 @@
                 <a:ea typeface="Arial" pitchFamily="34" charset="-122"/>
                 <a:cs typeface="Arial" pitchFamily="34" charset="-120"/>
               </a:rPr>
-              <a:t>Child B simply eats more food than Child A</a:t>
+              <a:t>70 g</a:t>
             </a:r>
             <a:endParaRPr lang="en-US" sz="1700" dirty="0"/>
           </a:p>
@@ -2221,7 +2221,7 @@
                 <a:ea typeface="Arial" pitchFamily="34" charset="-122"/>
                 <a:cs typeface="Arial" pitchFamily="34" charset="-120"/>
               </a:rPr>
-              <a:t>The two foods are made of different chemicals, and ugali has very little protein</a:t>
+              <a:t>85 g</a:t>
             </a:r>
             <a:endParaRPr lang="en-US" sz="1700" dirty="0"/>
           </a:p>
@@ -2321,7 +2321,7 @@
                 <a:ea typeface="Arial" pitchFamily="34" charset="-122"/>
                 <a:cs typeface="Arial" pitchFamily="34" charset="-120"/>
               </a:rPr>
-              <a:t>Ugali has no nutrients at all</a:t>
+              <a:t>105 g</a:t>
             </a:r>
             <a:endParaRPr lang="en-US" sz="1700" dirty="0"/>
           </a:p>
@@ -2421,7 +2421,7 @@
                 <a:ea typeface="Arial" pitchFamily="34" charset="-122"/>
                 <a:cs typeface="Arial" pitchFamily="34" charset="-120"/>
               </a:rPr>
-              <a:t>Child A is ill only because he drinks too little water</a:t>
+              <a:t>95 g</a:t>
             </a:r>
             <a:endParaRPr lang="en-US" sz="1700" dirty="0"/>
           </a:p>
@@ -2623,7 +2623,7 @@
               <a:buNone/>
             </a:pPr>
             <a:r>
-              <a:rPr lang="en-US" sz="2300" b="1" dirty="0">
+              <a:rPr lang="en-US" sz="2000" b="1" dirty="0">
                 <a:solidFill>
                   <a:srgbClr val="FFFFFF"/>
                 </a:solidFill>
@@ -2631,9 +2631,9 @@
                 <a:ea typeface="Arial" pitchFamily="34" charset="-122"/>
                 <a:cs typeface="Arial" pitchFamily="34" charset="-120"/>
               </a:rPr>
-              <a:t>Which list correctly names the six major chemicals of life?</a:t>
-            </a:r>
-            <a:endParaRPr lang="en-US" sz="2300" dirty="0"/>
+              <a:t>Mr Otieno heats a small piece of dry maize flour in a flame and it turns black. Table salt heated in the same flame does not turn black. What does the black residue show?</a:t>
+            </a:r>
+            <a:endParaRPr lang="en-US" sz="2000" dirty="0"/>
           </a:p>
         </p:txBody>
       </p:sp>
@@ -2731,7 +2731,7 @@
                 <a:ea typeface="Arial" pitchFamily="34" charset="-122"/>
                 <a:cs typeface="Arial" pitchFamily="34" charset="-120"/>
               </a:rPr>
-              <a:t>Carbohydrates, proteins, energy, nucleic acids, vitamins/minerals, water</a:t>
+              <a:t>The maize flour contains salt, which turns black when heated</a:t>
             </a:r>
             <a:endParaRPr lang="en-US" sz="1700" dirty="0"/>
           </a:p>
@@ -2831,7 +2831,7 @@
                 <a:ea typeface="Arial" pitchFamily="34" charset="-122"/>
                 <a:cs typeface="Arial" pitchFamily="34" charset="-120"/>
               </a:rPr>
-              <a:t>Carbohydrates, proteins, lipids, nucleic acids, vitamins/minerals, water</a:t>
+              <a:t>The maize flour contains carbon, which is present in organic compounds</a:t>
             </a:r>
             <a:endParaRPr lang="en-US" sz="1700" dirty="0"/>
           </a:p>
@@ -2931,7 +2931,7 @@
                 <a:ea typeface="Arial" pitchFamily="34" charset="-122"/>
                 <a:cs typeface="Arial" pitchFamily="34" charset="-120"/>
               </a:rPr>
-              <a:t>Starch, sugar, proteins, lipids, vitamins/minerals, water</a:t>
+              <a:t>The maize flour contains iron, which turns black when heated</a:t>
             </a:r>
             <a:endParaRPr lang="en-US" sz="1700" dirty="0"/>
           </a:p>
@@ -3031,7 +3031,7 @@
                 <a:ea typeface="Arial" pitchFamily="34" charset="-122"/>
                 <a:cs typeface="Arial" pitchFamily="34" charset="-120"/>
               </a:rPr>
-              <a:t>Carbohydrates, proteins, lipids, fibre, vitamins/minerals, water</a:t>
+              <a:t>The maize flour contains water, which turns black when heated</a:t>
             </a:r>
             <a:endParaRPr lang="en-US" sz="1700" dirty="0"/>
           </a:p>
@@ -3241,7 +3241,7 @@
                 <a:ea typeface="Arial" pitchFamily="34" charset="-122"/>
                 <a:cs typeface="Arial" pitchFamily="34" charset="-120"/>
               </a:rPr>
-              <a:t>During the food card sort, a learner places beans under carbohydrates because 'githeri is just a starch food'. Which response best corrects this idea?</a:t>
+              <a:t>Starch (a carbohydrate) is made of C, H and O. Which element is found in proteins, such as those in beans and milk, but is NOT found in carbohydrates like starch?</a:t>
             </a:r>
             <a:endParaRPr lang="en-US" sz="2000" dirty="0"/>
           </a:p>
@@ -3333,7 +3333,7 @@
               <a:buNone/>
             </a:pPr>
             <a:r>
-              <a:rPr lang="en-US" sz="1300" dirty="0">
+              <a:rPr lang="en-US" sz="1700" dirty="0">
                 <a:solidFill>
                   <a:srgbClr val="FFFFFF"/>
                 </a:solidFill>
@@ -3341,9 +3341,9 @@
                 <a:ea typeface="Arial" pitchFamily="34" charset="-122"/>
                 <a:cs typeface="Arial" pitchFamily="34" charset="-120"/>
               </a:rPr>
-              <a:t>Beans are a rich source of protein, so they belong under proteins even though maize in githeri is mostly carbohydrate</a:t>
-            </a:r>
-            <a:endParaRPr lang="en-US" sz="1300" dirty="0"/>
+              <a:t>Oxygen (O)</a:t>
+            </a:r>
+            <a:endParaRPr lang="en-US" sz="1700" dirty="0"/>
           </a:p>
         </p:txBody>
       </p:sp>
@@ -3433,7 +3433,7 @@
               <a:buNone/>
             </a:pPr>
             <a:r>
-              <a:rPr lang="en-US" sz="1300" dirty="0">
+              <a:rPr lang="en-US" sz="1700" dirty="0">
                 <a:solidFill>
                   <a:srgbClr val="FFFFFF"/>
                 </a:solidFill>
@@ -3441,9 +3441,9 @@
                 <a:ea typeface="Arial" pitchFamily="34" charset="-122"/>
                 <a:cs typeface="Arial" pitchFamily="34" charset="-120"/>
               </a:rPr>
-              <a:t>Beans belong under vitamins because they are small and round</a:t>
-            </a:r>
-            <a:endParaRPr lang="en-US" sz="1300" dirty="0"/>
+              <a:t>Nitrogen (N)</a:t>
+            </a:r>
+            <a:endParaRPr lang="en-US" sz="1700" dirty="0"/>
           </a:p>
         </p:txBody>
       </p:sp>
@@ -3533,7 +3533,7 @@
               <a:buNone/>
             </a:pPr>
             <a:r>
-              <a:rPr lang="en-US" sz="1300" dirty="0">
+              <a:rPr lang="en-US" sz="1700" dirty="0">
                 <a:solidFill>
                   <a:srgbClr val="FFFFFF"/>
                 </a:solidFill>
@@ -3541,9 +3541,9 @@
                 <a:ea typeface="Arial" pitchFamily="34" charset="-122"/>
                 <a:cs typeface="Arial" pitchFamily="34" charset="-120"/>
               </a:rPr>
-              <a:t>Beans belong under water because they are cooked in water</a:t>
-            </a:r>
-            <a:endParaRPr lang="en-US" sz="1300" dirty="0"/>
+              <a:t>Hydrogen (H)</a:t>
+            </a:r>
+            <a:endParaRPr lang="en-US" sz="1700" dirty="0"/>
           </a:p>
         </p:txBody>
       </p:sp>
@@ -3633,7 +3633,7 @@
               <a:buNone/>
             </a:pPr>
             <a:r>
-              <a:rPr lang="en-US" sz="1300" dirty="0">
+              <a:rPr lang="en-US" sz="1700" dirty="0">
                 <a:solidFill>
                   <a:srgbClr val="FFFFFF"/>
                 </a:solidFill>
@@ -3641,9 +3641,9 @@
                 <a:ea typeface="Arial" pitchFamily="34" charset="-122"/>
                 <a:cs typeface="Arial" pitchFamily="34" charset="-120"/>
               </a:rPr>
-              <a:t>Beans belong under carbohydrates because all plant foods are mainly starch</a:t>
-            </a:r>
-            <a:endParaRPr lang="en-US" sz="1300" dirty="0"/>
+              <a:t>Carbon (C)</a:t>
+            </a:r>
+            <a:endParaRPr lang="en-US" sz="1700" dirty="0"/>
           </a:p>
         </p:txBody>
       </p:sp>
@@ -3843,7 +3843,7 @@
               <a:buNone/>
             </a:pPr>
             <a:r>
-              <a:rPr lang="en-US" sz="2000" b="1" dirty="0">
+              <a:rPr lang="en-US" sz="2300" b="1" dirty="0">
                 <a:solidFill>
                   <a:srgbClr val="FFFFFF"/>
                 </a:solidFill>
@@ -3851,9 +3851,9 @@
                 <a:ea typeface="Arial" pitchFamily="34" charset="-122"/>
                 <a:cs typeface="Arial" pitchFamily="34" charset="-120"/>
               </a:rPr>
-              <a:t>The child who eats only ugali gets plenty of energy from starch but still develops kwashiorkor. What is the best explanation?</a:t>
-            </a:r>
-            <a:endParaRPr lang="en-US" sz="2000" dirty="0"/>
+              <a:t>Which list contains ONLY organic compounds found in Wanjiru's meal?</a:t>
+            </a:r>
+            <a:endParaRPr lang="en-US" sz="2300" dirty="0"/>
           </a:p>
         </p:txBody>
       </p:sp>
@@ -3943,7 +3943,7 @@
               <a:buNone/>
             </a:pPr>
             <a:r>
-              <a:rPr lang="en-US" sz="1500" dirty="0">
+              <a:rPr lang="en-US" sz="1700" dirty="0">
                 <a:solidFill>
                   <a:srgbClr val="FFFFFF"/>
                 </a:solidFill>
@@ -3951,9 +3951,9 @@
                 <a:ea typeface="Arial" pitchFamily="34" charset="-122"/>
                 <a:cs typeface="Arial" pitchFamily="34" charset="-120"/>
               </a:rPr>
-              <a:t>The child gets too much protein from ugali</a:t>
-            </a:r>
-            <a:endParaRPr lang="en-US" sz="1500" dirty="0"/>
+              <a:t>Protein, calcium salts, fat, starch</a:t>
+            </a:r>
+            <a:endParaRPr lang="en-US" sz="1700" dirty="0"/>
           </a:p>
         </p:txBody>
       </p:sp>
@@ -4043,7 +4043,7 @@
               <a:buNone/>
             </a:pPr>
             <a:r>
-              <a:rPr lang="en-US" sz="1500" dirty="0">
+              <a:rPr lang="en-US" sz="1700" dirty="0">
                 <a:solidFill>
                   <a:srgbClr val="FFFFFF"/>
                 </a:solidFill>
@@ -4051,9 +4051,9 @@
                 <a:ea typeface="Arial" pitchFamily="34" charset="-122"/>
                 <a:cs typeface="Arial" pitchFamily="34" charset="-120"/>
               </a:rPr>
-              <a:t>Starch is harmful and damages the body</a:t>
-            </a:r>
-            <a:endParaRPr lang="en-US" sz="1500" dirty="0"/>
+              <a:t>Starch, water, fat, vitamin C</a:t>
+            </a:r>
+            <a:endParaRPr lang="en-US" sz="1700" dirty="0"/>
           </a:p>
         </p:txBody>
       </p:sp>
@@ -4143,7 +4143,7 @@
               <a:buNone/>
             </a:pPr>
             <a:r>
-              <a:rPr lang="en-US" sz="1500" dirty="0">
+              <a:rPr lang="en-US" sz="1700" dirty="0">
                 <a:solidFill>
                   <a:srgbClr val="FFFFFF"/>
                 </a:solidFill>
@@ -4151,9 +4151,9 @@
                 <a:ea typeface="Arial" pitchFamily="34" charset="-122"/>
                 <a:cs typeface="Arial" pitchFamily="34" charset="-120"/>
               </a:rPr>
-              <a:t>Carbohydrates supply energy, but ugali has almost no protein, so the body cannot build and repair its tissues</a:t>
-            </a:r>
-            <a:endParaRPr lang="en-US" sz="1500" dirty="0"/>
+              <a:t>Water, iron salts, calcium salts, protein</a:t>
+            </a:r>
+            <a:endParaRPr lang="en-US" sz="1700" dirty="0"/>
           </a:p>
         </p:txBody>
       </p:sp>
@@ -4243,7 +4243,7 @@
               <a:buNone/>
             </a:pPr>
             <a:r>
-              <a:rPr lang="en-US" sz="1500" dirty="0">
+              <a:rPr lang="en-US" sz="1700" dirty="0">
                 <a:solidFill>
                   <a:srgbClr val="FFFFFF"/>
                 </a:solidFill>
@@ -4251,9 +4251,9 @@
                 <a:ea typeface="Arial" pitchFamily="34" charset="-122"/>
                 <a:cs typeface="Arial" pitchFamily="34" charset="-120"/>
               </a:rPr>
-              <a:t>Energy is not needed by the body, so the starch is wasted</a:t>
-            </a:r>
-            <a:endParaRPr lang="en-US" sz="1500" dirty="0"/>
+              <a:t>Starch, protein, fat, vitamin C</a:t>
+            </a:r>
+            <a:endParaRPr lang="en-US" sz="1700" dirty="0"/>
           </a:p>
         </p:txBody>
       </p:sp>
@@ -4422,7 +4422,7 @@
                 <a:ea typeface="Arial" pitchFamily="34" charset="-122"/>
                 <a:cs typeface="Arial" pitchFamily="34" charset="-120"/>
               </a:rPr>
-              <a:t>Use after: DQB phase</a:t>
+              <a:t>Use after: Explain phase</a:t>
             </a:r>
             <a:endParaRPr lang="en-US" sz="1100" dirty="0"/>
           </a:p>
@@ -4453,7 +4453,7 @@
               <a:buNone/>
             </a:pPr>
             <a:r>
-              <a:rPr lang="en-US" sz="2000" b="1" dirty="0">
+              <a:rPr lang="en-US" sz="2300" b="1" dirty="0">
                 <a:solidFill>
                   <a:srgbClr val="FFFFFF"/>
                 </a:solidFill>
@@ -4461,9 +4461,9 @@
                 <a:ea typeface="Arial" pitchFamily="34" charset="-122"/>
                 <a:cs typeface="Arial" pitchFamily="34" charset="-120"/>
               </a:rPr>
-              <a:t>A learner writes this on a green sticky note: 'I now understand that ugali has no nutrients at all.' Which statement is the correct improvement?</a:t>
-            </a:r>
-            <a:endParaRPr lang="en-US" sz="2000" dirty="0"/>
+              <a:t>Water is found in every living thing and in all foods, yet it is placed in the inorganic column. Why?</a:t>
+            </a:r>
+            <a:endParaRPr lang="en-US" sz="2300" dirty="0"/>
           </a:p>
         </p:txBody>
       </p:sp>
@@ -4553,7 +4553,7 @@
               <a:buNone/>
             </a:pPr>
             <a:r>
-              <a:rPr lang="en-US" sz="1500" dirty="0">
+              <a:rPr lang="en-US" sz="1700" dirty="0">
                 <a:solidFill>
                   <a:srgbClr val="FFFFFF"/>
                 </a:solidFill>
@@ -4561,9 +4561,9 @@
                 <a:ea typeface="Arial" pitchFamily="34" charset="-122"/>
                 <a:cs typeface="Arial" pitchFamily="34" charset="-120"/>
               </a:rPr>
-              <a:t>Ugali is made only of water</a:t>
-            </a:r>
-            <a:endParaRPr lang="en-US" sz="1500" dirty="0"/>
+              <a:t>Water is a liquid and organic compounds are always solids</a:t>
+            </a:r>
+            <a:endParaRPr lang="en-US" sz="1700" dirty="0"/>
           </a:p>
         </p:txBody>
       </p:sp>
@@ -4653,7 +4653,7 @@
               <a:buNone/>
             </a:pPr>
             <a:r>
-              <a:rPr lang="en-US" sz="1500" dirty="0">
+              <a:rPr lang="en-US" sz="1700" dirty="0">
                 <a:solidFill>
                   <a:srgbClr val="FFFFFF"/>
                 </a:solidFill>
@@ -4661,9 +4661,9 @@
                 <a:ea typeface="Arial" pitchFamily="34" charset="-122"/>
                 <a:cs typeface="Arial" pitchFamily="34" charset="-120"/>
               </a:rPr>
-              <a:t>Ugali is rich in carbohydrate for energy, but it has too little protein to build and repair the body</a:t>
-            </a:r>
-            <a:endParaRPr lang="en-US" sz="1500" dirty="0"/>
+              <a:t>Water is not a chemical, so it cannot be organic</a:t>
+            </a:r>
+            <a:endParaRPr lang="en-US" sz="1700" dirty="0"/>
           </a:p>
         </p:txBody>
       </p:sp>
@@ -4753,7 +4753,7 @@
               <a:buNone/>
             </a:pPr>
             <a:r>
-              <a:rPr lang="en-US" sz="1500" dirty="0">
+              <a:rPr lang="en-US" sz="1700" dirty="0">
                 <a:solidFill>
                   <a:srgbClr val="FFFFFF"/>
                 </a:solidFill>
@@ -4761,9 +4761,9 @@
                 <a:ea typeface="Arial" pitchFamily="34" charset="-122"/>
                 <a:cs typeface="Arial" pitchFamily="34" charset="-120"/>
               </a:rPr>
-              <a:t>Ugali is a poor food because it has no carbohydrate</a:t>
-            </a:r>
-            <a:endParaRPr lang="en-US" sz="1500" dirty="0"/>
+              <a:t>Water is made of only hydrogen and oxygen and has no carbon bonded to hydrogen</a:t>
+            </a:r>
+            <a:endParaRPr lang="en-US" sz="1700" dirty="0"/>
           </a:p>
         </p:txBody>
       </p:sp>
@@ -4853,7 +4853,7 @@
               <a:buNone/>
             </a:pPr>
             <a:r>
-              <a:rPr lang="en-US" sz="1500" dirty="0">
+              <a:rPr lang="en-US" sz="1700" dirty="0">
                 <a:solidFill>
                   <a:srgbClr val="FFFFFF"/>
                 </a:solidFill>
@@ -4861,9 +4861,9 @@
                 <a:ea typeface="Arial" pitchFamily="34" charset="-122"/>
                 <a:cs typeface="Arial" pitchFamily="34" charset="-120"/>
               </a:rPr>
-              <a:t>Ugali contains more protein than githeri</a:t>
-            </a:r>
-            <a:endParaRPr lang="en-US" sz="1500" dirty="0"/>
+              <a:t>Water is not found inside cells</a:t>
+            </a:r>
+            <a:endParaRPr lang="en-US" sz="1700" dirty="0"/>
           </a:p>
         </p:txBody>
       </p:sp>
@@ -5032,7 +5032,7 @@
                 <a:ea typeface="Arial" pitchFamily="34" charset="-122"/>
                 <a:cs typeface="Arial" pitchFamily="34" charset="-120"/>
               </a:rPr>
-              <a:t>Use after: Model Building phase</a:t>
+              <a:t>Use after: Explain phase</a:t>
             </a:r>
             <a:endParaRPr lang="en-US" sz="1100" dirty="0"/>
           </a:p>
@@ -5071,7 +5071,7 @@
                 <a:ea typeface="Arial" pitchFamily="34" charset="-122"/>
                 <a:cs typeface="Arial" pitchFamily="34" charset="-120"/>
               </a:rPr>
-              <a:t>You draw a model with one circle for ugali and one for githeri, showing the six chemicals of life in each. Which feature would show the biggest chemical difference that explains the health of the two children?</a:t>
+              <a:t>Wanjiru's blood glucose rose after she ate a meal containing about 70 g carbohydrate in ugali, about 20 g protein in beans and about 10 g fat from cooking oil. Which claim and evidence is best supported by this data?</a:t>
             </a:r>
             <a:endParaRPr lang="en-US" sz="1800" dirty="0"/>
           </a:p>
@@ -5163,7 +5163,7 @@
               <a:buNone/>
             </a:pPr>
             <a:r>
-              <a:rPr lang="en-US" sz="1500" dirty="0">
+              <a:rPr lang="en-US" sz="1300" dirty="0">
                 <a:solidFill>
                   <a:srgbClr val="FFFFFF"/>
                 </a:solidFill>
@@ -5171,9 +5171,9 @@
                 <a:ea typeface="Arial" pitchFamily="34" charset="-122"/>
                 <a:cs typeface="Arial" pitchFamily="34" charset="-120"/>
               </a:rPr>
-              <a:t>A larger water section in the ugali circle only</a:t>
-            </a:r>
-            <a:endParaRPr lang="en-US" sz="1500" dirty="0"/>
+              <a:t>Water is most likely the cause, because it is found in all foods</a:t>
+            </a:r>
+            <a:endParaRPr lang="en-US" sz="1300" dirty="0"/>
           </a:p>
         </p:txBody>
       </p:sp>
@@ -5263,7 +5263,7 @@
               <a:buNone/>
             </a:pPr>
             <a:r>
-              <a:rPr lang="en-US" sz="1500" dirty="0">
+              <a:rPr lang="en-US" sz="1300" dirty="0">
                 <a:solidFill>
                   <a:srgbClr val="FFFFFF"/>
                 </a:solidFill>
@@ -5271,9 +5271,9 @@
                 <a:ea typeface="Arial" pitchFamily="34" charset="-122"/>
                 <a:cs typeface="Arial" pitchFamily="34" charset="-120"/>
               </a:rPr>
-              <a:t>A much larger carbohydrate section in the githeri circle than in the ugali circle</a:t>
-            </a:r>
-            <a:endParaRPr lang="en-US" sz="1500" dirty="0"/>
+              <a:t>Protein is most likely the cause, because beans contain 20 g of it</a:t>
+            </a:r>
+            <a:endParaRPr lang="en-US" sz="1300" dirty="0"/>
           </a:p>
         </p:txBody>
       </p:sp>
@@ -5363,7 +5363,7 @@
               <a:buNone/>
             </a:pPr>
             <a:r>
-              <a:rPr lang="en-US" sz="1500" dirty="0">
+              <a:rPr lang="en-US" sz="1300" dirty="0">
                 <a:solidFill>
                   <a:srgbClr val="FFFFFF"/>
                 </a:solidFill>
@@ -5371,9 +5371,9 @@
                 <a:ea typeface="Arial" pitchFamily="34" charset="-122"/>
                 <a:cs typeface="Arial" pitchFamily="34" charset="-120"/>
               </a:rPr>
-              <a:t>A larger protein section in the githeri circle than in the ugali circle</a:t>
-            </a:r>
-            <a:endParaRPr lang="en-US" sz="1500" dirty="0"/>
+              <a:t>Fat is most likely the cause, because cooking oil is added to the meal</a:t>
+            </a:r>
+            <a:endParaRPr lang="en-US" sz="1300" dirty="0"/>
           </a:p>
         </p:txBody>
       </p:sp>
@@ -5463,7 +5463,7 @@
               <a:buNone/>
             </a:pPr>
             <a:r>
-              <a:rPr lang="en-US" sz="1500" dirty="0">
+              <a:rPr lang="en-US" sz="1300" dirty="0">
                 <a:solidFill>
                   <a:srgbClr val="FFFFFF"/>
                 </a:solidFill>
@@ -5471,9 +5471,9 @@
                 <a:ea typeface="Arial" pitchFamily="34" charset="-122"/>
                 <a:cs typeface="Arial" pitchFamily="34" charset="-120"/>
               </a:rPr>
-              <a:t>No difference at all between the two circles</a:t>
-            </a:r>
-            <a:endParaRPr lang="en-US" sz="1500" dirty="0"/>
+              <a:t>Carbohydrate is most likely the cause, because the meal contains about 70 g of it in ugali, more than any other nutrient</a:t>
+            </a:r>
+            <a:endParaRPr lang="en-US" sz="1300" dirty="0"/>
           </a:p>
         </p:txBody>
       </p:sp>
@@ -5642,7 +5642,7 @@
                 <a:ea typeface="Arial" pitchFamily="34" charset="-122"/>
                 <a:cs typeface="Arial" pitchFamily="34" charset="-120"/>
               </a:rPr>
-              <a:t>Use after: End of lesson</a:t>
+              <a:t>Use after: Model Building phase</a:t>
             </a:r>
             <a:endParaRPr lang="en-US" sz="1100" dirty="0"/>
           </a:p>
@@ -5673,7 +5673,7 @@
               <a:buNone/>
             </a:pPr>
             <a:r>
-              <a:rPr lang="en-US" sz="2300" b="1" dirty="0">
+              <a:rPr lang="en-US" sz="2000" b="1" dirty="0">
                 <a:solidFill>
                   <a:srgbClr val="FFFFFF"/>
                 </a:solidFill>
@@ -5681,9 +5681,9 @@
                 <a:ea typeface="Arial" pitchFamily="34" charset="-122"/>
                 <a:cs typeface="Arial" pitchFamily="34" charset="-120"/>
               </a:rPr>
-              <a:t>Which pairing of a Kenyan food with the chemical of life it is especially rich in is correct?</a:t>
-            </a:r>
-            <a:endParaRPr lang="en-US" sz="2300" dirty="0"/>
+              <a:t>In the class model, the first box 'Food chemicals' is filled in, but the box 'Glucose in blood' is left as a question mark. Why?</a:t>
+            </a:r>
+            <a:endParaRPr lang="en-US" sz="2000" dirty="0"/>
           </a:p>
         </p:txBody>
       </p:sp>
@@ -5773,7 +5773,7 @@
               <a:buNone/>
             </a:pPr>
             <a:r>
-              <a:rPr lang="en-US" sz="1700" dirty="0">
+              <a:rPr lang="en-US" sz="1500" dirty="0">
                 <a:solidFill>
                   <a:srgbClr val="FFFFFF"/>
                 </a:solidFill>
@@ -5781,9 +5781,9 @@
                 <a:ea typeface="Arial" pitchFamily="34" charset="-122"/>
                 <a:cs typeface="Arial" pitchFamily="34" charset="-120"/>
               </a:rPr>
-              <a:t>Sukuma wiki: lipids</a:t>
-            </a:r>
-            <a:endParaRPr lang="en-US" sz="1700" dirty="0"/>
+              <a:t>We know the kinds of chemicals in the lunch, but we do not yet know which one becomes glucose or how</a:t>
+            </a:r>
+            <a:endParaRPr lang="en-US" sz="1500" dirty="0"/>
           </a:p>
         </p:txBody>
       </p:sp>
@@ -5873,7 +5873,7 @@
               <a:buNone/>
             </a:pPr>
             <a:r>
-              <a:rPr lang="en-US" sz="1700" dirty="0">
+              <a:rPr lang="en-US" sz="1500" dirty="0">
                 <a:solidFill>
                   <a:srgbClr val="FFFFFF"/>
                 </a:solidFill>
@@ -5881,9 +5881,9 @@
                 <a:ea typeface="Arial" pitchFamily="34" charset="-122"/>
                 <a:cs typeface="Arial" pitchFamily="34" charset="-120"/>
               </a:rPr>
-              <a:t>Omena: carbohydrates</a:t>
-            </a:r>
-            <a:endParaRPr lang="en-US" sz="1700" dirty="0"/>
+              <a:t>Carbohydrates have no link to the glucose rise</a:t>
+            </a:r>
+            <a:endParaRPr lang="en-US" sz="1500" dirty="0"/>
           </a:p>
         </p:txBody>
       </p:sp>
@@ -5973,7 +5973,7 @@
               <a:buNone/>
             </a:pPr>
             <a:r>
-              <a:rPr lang="en-US" sz="1700" dirty="0">
+              <a:rPr lang="en-US" sz="1500" dirty="0">
                 <a:solidFill>
                   <a:srgbClr val="FFFFFF"/>
                 </a:solidFill>
@@ -5981,9 +5981,9 @@
                 <a:ea typeface="Arial" pitchFamily="34" charset="-122"/>
                 <a:cs typeface="Arial" pitchFamily="34" charset="-120"/>
               </a:rPr>
-              <a:t>Ugali: proteins</a:t>
-            </a:r>
-            <a:endParaRPr lang="en-US" sz="1700" dirty="0"/>
+              <a:t>Glucose is never found in blood</a:t>
+            </a:r>
+            <a:endParaRPr lang="en-US" sz="1500" dirty="0"/>
           </a:p>
         </p:txBody>
       </p:sp>
@@ -6073,7 +6073,7 @@
               <a:buNone/>
             </a:pPr>
             <a:r>
-              <a:rPr lang="en-US" sz="1700" dirty="0">
+              <a:rPr lang="en-US" sz="1500" dirty="0">
                 <a:solidFill>
                   <a:srgbClr val="FFFFFF"/>
                 </a:solidFill>
@@ -6081,9 +6081,9 @@
                 <a:ea typeface="Arial" pitchFamily="34" charset="-122"/>
                 <a:cs typeface="Arial" pitchFamily="34" charset="-120"/>
               </a:rPr>
-              <a:t>Avocado: lipids (fats and oils)</a:t>
-            </a:r>
-            <a:endParaRPr lang="en-US" sz="1700" dirty="0"/>
+              <a:t>The model is finished and no more boxes are needed</a:t>
+            </a:r>
+            <a:endParaRPr lang="en-US" sz="1500" dirty="0"/>
           </a:p>
         </p:txBody>
       </p:sp>
